--- a/Social_Media_Dashboard_Presentation.pptx
+++ b/Social_Media_Dashboard_Presentation.pptx
@@ -5,7 +5,7 @@
     <p:sldMasterId id="2147483648" r:id="rId1"/>
   </p:sldMasterIdLst>
   <p:notesMasterIdLst>
-    <p:notesMasterId r:id="rId10"/>
+    <p:notesMasterId r:id="rId9"/>
   </p:notesMasterIdLst>
   <p:sldIdLst>
     <p:sldId id="262" r:id="rId2"/>
@@ -15,7 +15,6 @@
     <p:sldId id="259" r:id="rId6"/>
     <p:sldId id="260" r:id="rId7"/>
     <p:sldId id="261" r:id="rId8"/>
-    <p:sldId id="263" r:id="rId9"/>
   </p:sldIdLst>
   <p:sldSz cx="9144000" cy="5143500" type="screen16x9"/>
   <p:notesSz cx="5143500" cy="9144000"/>
@@ -122,7 +121,7 @@
 <file path=ppt/revisionInfo.xml><?xml version="1.0" encoding="utf-8"?>
 <p1510:revInfo xmlns:a="http://schemas.openxmlformats.org/drawingml/2006/main" xmlns:r="http://schemas.openxmlformats.org/officeDocument/2006/relationships" xmlns:p1510="http://schemas.microsoft.com/office/powerpoint/2015/10/main">
   <p1510:revLst>
-    <p1510:client id="{A792BDA6-C791-4B22-9DC3-1A1655DDF07B}" v="29" dt="2026-09-29T15:23:39.175"/>
+    <p1510:client id="{A792BDA6-C791-4B22-9DC3-1A1655DDF07B}" v="30" dt="2026-09-30T07:08:27.360"/>
   </p1510:revLst>
 </p1510:revInfo>
 </file>
@@ -131,8 +130,8 @@
 <pc:chgInfo xmlns:a="http://schemas.openxmlformats.org/drawingml/2006/main" xmlns:r="http://schemas.openxmlformats.org/officeDocument/2006/relationships" xmlns:ac="http://schemas.microsoft.com/office/drawing/2013/main/command" xmlns:pc="http://schemas.microsoft.com/office/powerpoint/2013/main/command">
   <pc:docChgLst>
     <pc:chgData name="SAKETH REDDY BALIREDDY" userId="5cc6f2719cce2d95" providerId="LiveId" clId="{541D16BA-E9C2-4D08-81BA-73EED0C07D0A}"/>
-    <pc:docChg chg="undo custSel addSld modSld sldOrd">
-      <pc:chgData name="SAKETH REDDY BALIREDDY" userId="5cc6f2719cce2d95" providerId="LiveId" clId="{541D16BA-E9C2-4D08-81BA-73EED0C07D0A}" dt="2026-09-30T05:38:41.594" v="344" actId="680"/>
+    <pc:docChg chg="undo custSel addSld delSld modSld sldOrd">
+      <pc:chgData name="SAKETH REDDY BALIREDDY" userId="5cc6f2719cce2d95" providerId="LiveId" clId="{541D16BA-E9C2-4D08-81BA-73EED0C07D0A}" dt="2026-09-30T07:14:12.131" v="356"/>
       <pc:docMkLst>
         <pc:docMk/>
       </pc:docMkLst>
@@ -516,8 +515,8 @@
           </ac:spMkLst>
         </pc:spChg>
       </pc:sldChg>
-      <pc:sldChg chg="modSp mod">
-        <pc:chgData name="SAKETH REDDY BALIREDDY" userId="5cc6f2719cce2d95" providerId="LiveId" clId="{541D16BA-E9C2-4D08-81BA-73EED0C07D0A}" dt="2026-09-30T05:37:15.443" v="343" actId="20577"/>
+      <pc:sldChg chg="modSp mod ord">
+        <pc:chgData name="SAKETH REDDY BALIREDDY" userId="5cc6f2719cce2d95" providerId="LiveId" clId="{541D16BA-E9C2-4D08-81BA-73EED0C07D0A}" dt="2026-09-30T07:14:12.131" v="356"/>
         <pc:sldMkLst>
           <pc:docMk/>
           <pc:sldMk cId="0" sldId="261"/>
@@ -548,17 +547,25 @@
         </pc:spChg>
       </pc:sldChg>
       <pc:sldChg chg="addSp modSp new mod ord modTransition modAnim">
-        <pc:chgData name="SAKETH REDDY BALIREDDY" userId="5cc6f2719cce2d95" providerId="LiveId" clId="{541D16BA-E9C2-4D08-81BA-73EED0C07D0A}" dt="2026-09-29T14:55:13.043" v="268"/>
+        <pc:chgData name="SAKETH REDDY BALIREDDY" userId="5cc6f2719cce2d95" providerId="LiveId" clId="{541D16BA-E9C2-4D08-81BA-73EED0C07D0A}" dt="2026-09-30T07:08:27.360" v="354" actId="20577"/>
         <pc:sldMkLst>
           <pc:docMk/>
           <pc:sldMk cId="2240158043" sldId="262"/>
         </pc:sldMkLst>
         <pc:spChg chg="add mod">
-          <ac:chgData name="SAKETH REDDY BALIREDDY" userId="5cc6f2719cce2d95" providerId="LiveId" clId="{541D16BA-E9C2-4D08-81BA-73EED0C07D0A}" dt="2026-09-29T14:45:27.265" v="57" actId="1076"/>
+          <ac:chgData name="SAKETH REDDY BALIREDDY" userId="5cc6f2719cce2d95" providerId="LiveId" clId="{541D16BA-E9C2-4D08-81BA-73EED0C07D0A}" dt="2026-09-30T07:08:05.560" v="351" actId="113"/>
           <ac:spMkLst>
             <pc:docMk/>
             <pc:sldMk cId="2240158043" sldId="262"/>
             <ac:spMk id="3" creationId="{163F2C06-ED6B-C5B0-9376-FDC08658E67D}"/>
+          </ac:spMkLst>
+        </pc:spChg>
+        <pc:spChg chg="add">
+          <ac:chgData name="SAKETH REDDY BALIREDDY" userId="5cc6f2719cce2d95" providerId="LiveId" clId="{541D16BA-E9C2-4D08-81BA-73EED0C07D0A}" dt="2026-09-30T07:07:47.638" v="346" actId="22"/>
+          <ac:spMkLst>
+            <pc:docMk/>
+            <pc:sldMk cId="2240158043" sldId="262"/>
+            <ac:spMk id="4" creationId="{ED25848B-C56A-ADC6-D24F-8075BA7A0E1F}"/>
           </ac:spMkLst>
         </pc:spChg>
         <pc:spChg chg="add mod">
@@ -570,7 +577,7 @@
           </ac:spMkLst>
         </pc:spChg>
         <pc:spChg chg="add mod">
-          <ac:chgData name="SAKETH REDDY BALIREDDY" userId="5cc6f2719cce2d95" providerId="LiveId" clId="{541D16BA-E9C2-4D08-81BA-73EED0C07D0A}" dt="2026-09-29T14:50:30.672" v="181" actId="20577"/>
+          <ac:chgData name="SAKETH REDDY BALIREDDY" userId="5cc6f2719cce2d95" providerId="LiveId" clId="{541D16BA-E9C2-4D08-81BA-73EED0C07D0A}" dt="2026-09-30T07:08:27.360" v="354" actId="20577"/>
           <ac:spMkLst>
             <pc:docMk/>
             <pc:sldMk cId="2240158043" sldId="262"/>
@@ -578,8 +585,8 @@
           </ac:spMkLst>
         </pc:spChg>
       </pc:sldChg>
-      <pc:sldChg chg="new">
-        <pc:chgData name="SAKETH REDDY BALIREDDY" userId="5cc6f2719cce2d95" providerId="LiveId" clId="{541D16BA-E9C2-4D08-81BA-73EED0C07D0A}" dt="2026-09-30T05:38:41.594" v="344" actId="680"/>
+      <pc:sldChg chg="new del">
+        <pc:chgData name="SAKETH REDDY BALIREDDY" userId="5cc6f2719cce2d95" providerId="LiveId" clId="{541D16BA-E9C2-4D08-81BA-73EED0C07D0A}" dt="2026-09-30T07:03:52.061" v="345" actId="47"/>
         <pc:sldMkLst>
           <pc:docMk/>
           <pc:sldMk cId="3820105850" sldId="263"/>
@@ -1583,7 +1590,7 @@
               <a:buNone/>
             </a:pPr>
             <a:r>
-              <a:rPr lang="en-US" sz="3200" b="1" dirty="0">
+              <a:rPr lang="en-US" sz="3200" dirty="0">
                 <a:solidFill>
                   <a:srgbClr val="0F172A"/>
                 </a:solidFill>
@@ -1598,7 +1605,7 @@
               <a:t> </a:t>
             </a:r>
             <a:r>
-              <a:rPr lang="en-US" sz="3200" b="1" dirty="0">
+              <a:rPr lang="en-US" sz="3200" dirty="0">
                 <a:solidFill>
                   <a:srgbClr val="0F172A"/>
                 </a:solidFill>
@@ -1669,7 +1676,7 @@
         </p:nvSpPr>
         <p:spPr>
           <a:xfrm>
-            <a:off x="2286000" y="3028919"/>
+            <a:off x="2286000" y="2548681"/>
             <a:ext cx="4572000" cy="1272143"/>
           </a:xfrm>
           <a:prstGeom prst="rect">
@@ -1724,13 +1731,45 @@
               <a:defRPr sz="2000"/>
             </a:pPr>
             <a:r>
+              <a:rPr lang="en-IN" sz="2000" dirty="0" err="1">
+                <a:latin typeface="Goudy Old Style" panose="02020502050305020303" pitchFamily="18" charset="0"/>
+              </a:rPr>
+              <a:t>Reg.No</a:t>
+            </a:r>
+            <a:r>
               <a:rPr lang="en-IN" sz="2000" dirty="0">
                 <a:latin typeface="Goudy Old Style" panose="02020502050305020303" pitchFamily="18" charset="0"/>
               </a:rPr>
-              <a:t>Reg.No.:9925051013</a:t>
-            </a:r>
-          </a:p>
-        </p:txBody>
+              <a:t>.: 9925051013</a:t>
+            </a:r>
+          </a:p>
+        </p:txBody>
+      </p:sp>
+      <p:sp>
+        <p:nvSpPr>
+          <p:cNvPr id="4" name="Shape 0">
+            <a:extLst>
+              <a:ext uri="{FF2B5EF4-FFF2-40B4-BE49-F238E27FC236}">
+                <a16:creationId xmlns:a16="http://schemas.microsoft.com/office/drawing/2014/main" id="{ED25848B-C56A-ADC6-D24F-8075BA7A0E1F}"/>
+              </a:ext>
+            </a:extLst>
+          </p:cNvPr>
+          <p:cNvSpPr/>
+          <p:nvPr/>
+        </p:nvSpPr>
+        <p:spPr>
+          <a:xfrm>
+            <a:off x="0" y="0"/>
+            <a:ext cx="9144000" cy="91440"/>
+          </a:xfrm>
+          <a:prstGeom prst="rect">
+            <a:avLst/>
+          </a:prstGeom>
+          <a:solidFill>
+            <a:srgbClr val="4F46E5"/>
+          </a:solidFill>
+          <a:ln/>
+        </p:spPr>
       </p:sp>
     </p:spTree>
     <p:extLst>
@@ -6474,36 +6513,6 @@
         </p:txBody>
       </p:sp>
     </p:spTree>
-  </p:cSld>
-  <p:clrMapOvr>
-    <a:masterClrMapping/>
-  </p:clrMapOvr>
-</p:sld>
-</file>
-
-<file path=ppt/slides/slide8.xml><?xml version="1.0" encoding="utf-8"?>
-<p:sld xmlns:a="http://schemas.openxmlformats.org/drawingml/2006/main" xmlns:r="http://schemas.openxmlformats.org/officeDocument/2006/relationships" xmlns:p="http://schemas.openxmlformats.org/presentationml/2006/main">
-  <p:cSld>
-    <p:spTree>
-      <p:nvGrpSpPr>
-        <p:cNvPr id="1" name=""/>
-        <p:cNvGrpSpPr/>
-        <p:nvPr/>
-      </p:nvGrpSpPr>
-      <p:grpSpPr>
-        <a:xfrm>
-          <a:off x="0" y="0"/>
-          <a:ext cx="0" cy="0"/>
-          <a:chOff x="0" y="0"/>
-          <a:chExt cx="0" cy="0"/>
-        </a:xfrm>
-      </p:grpSpPr>
-    </p:spTree>
-    <p:extLst>
-      <p:ext uri="{BB962C8B-B14F-4D97-AF65-F5344CB8AC3E}">
-        <p14:creationId xmlns:p14="http://schemas.microsoft.com/office/powerpoint/2010/main" val="3820105850"/>
-      </p:ext>
-    </p:extLst>
   </p:cSld>
   <p:clrMapOvr>
     <a:masterClrMapping/>
